--- a/PPTs/Ch4_ARM_Arithmetic_Logic_Exercises.pptx
+++ b/PPTs/Ch4_ARM_Arithmetic_Logic_Exercises.pptx
@@ -151,7 +151,7 @@
 <file path=ppt/revisionInfo.xml><?xml version="1.0" encoding="utf-8"?>
 <p1510:revInfo xmlns:a="http://schemas.openxmlformats.org/drawingml/2006/main" xmlns:r="http://schemas.openxmlformats.org/officeDocument/2006/relationships" xmlns:p1510="http://schemas.microsoft.com/office/powerpoint/2015/10/main">
   <p1510:revLst>
-    <p1510:client id="{191F7D32-A5D4-44C8-A28D-1F95E29E1B1E}" v="11" dt="2025-10-17T12:10:01.432"/>
+    <p1510:client id="{506567C5-EFA0-47BB-85F4-1CFD615DE70D}" v="1" dt="2026-02-26T16:12:25.436"/>
   </p1510:revLst>
 </p1510:revInfo>
 </file>
@@ -161,348 +161,24 @@
   <pc:docChgLst>
     <pc:chgData name="Zonghua Gu" userId="9a7e1853e1951ef5" providerId="LiveId" clId="{CF1FAA12-072C-4ED5-BA76-0FFFAEFDB88A}"/>
     <pc:docChg chg="undo custSel addSld delSld modSld sldOrd">
-      <pc:chgData name="Zonghua Gu" userId="9a7e1853e1951ef5" providerId="LiveId" clId="{CF1FAA12-072C-4ED5-BA76-0FFFAEFDB88A}" dt="2025-10-17T12:10:24.526" v="254" actId="47"/>
+      <pc:chgData name="Zonghua Gu" userId="9a7e1853e1951ef5" providerId="LiveId" clId="{CF1FAA12-072C-4ED5-BA76-0FFFAEFDB88A}" dt="2026-02-26T16:12:39.548" v="274" actId="20577"/>
       <pc:docMkLst>
         <pc:docMk/>
       </pc:docMkLst>
       <pc:sldChg chg="modSp mod">
-        <pc:chgData name="Zonghua Gu" userId="9a7e1853e1951ef5" providerId="LiveId" clId="{CF1FAA12-072C-4ED5-BA76-0FFFAEFDB88A}" dt="2025-09-24T02:21:52.230" v="0" actId="20577"/>
+        <pc:chgData name="Zonghua Gu" userId="9a7e1853e1951ef5" providerId="LiveId" clId="{CF1FAA12-072C-4ED5-BA76-0FFFAEFDB88A}" dt="2026-02-26T16:12:39.548" v="274" actId="20577"/>
         <pc:sldMkLst>
           <pc:docMk/>
-          <pc:sldMk cId="1227639730" sldId="256"/>
+          <pc:sldMk cId="409396528" sldId="257"/>
         </pc:sldMkLst>
         <pc:spChg chg="mod">
-          <ac:chgData name="Zonghua Gu" userId="9a7e1853e1951ef5" providerId="LiveId" clId="{CF1FAA12-072C-4ED5-BA76-0FFFAEFDB88A}" dt="2025-09-24T02:21:52.230" v="0" actId="20577"/>
+          <ac:chgData name="Zonghua Gu" userId="9a7e1853e1951ef5" providerId="LiveId" clId="{CF1FAA12-072C-4ED5-BA76-0FFFAEFDB88A}" dt="2026-02-26T16:12:39.548" v="274" actId="20577"/>
           <ac:spMkLst>
             <pc:docMk/>
-            <pc:sldMk cId="1227639730" sldId="256"/>
-            <ac:spMk id="5" creationId="{00000000-0000-0000-0000-000000000000}"/>
+            <pc:sldMk cId="409396528" sldId="257"/>
+            <ac:spMk id="4" creationId="{77B7521E-4543-F7E4-701C-9D4CAFA526F9}"/>
           </ac:spMkLst>
         </pc:spChg>
-      </pc:sldChg>
-      <pc:sldChg chg="del">
-        <pc:chgData name="Zonghua Gu" userId="9a7e1853e1951ef5" providerId="LiveId" clId="{CF1FAA12-072C-4ED5-BA76-0FFFAEFDB88A}" dt="2025-09-24T02:22:03.806" v="7" actId="47"/>
-        <pc:sldMkLst>
-          <pc:docMk/>
-          <pc:sldMk cId="3148296310" sldId="258"/>
-        </pc:sldMkLst>
-      </pc:sldChg>
-      <pc:sldChg chg="del">
-        <pc:chgData name="Zonghua Gu" userId="9a7e1853e1951ef5" providerId="LiveId" clId="{CF1FAA12-072C-4ED5-BA76-0FFFAEFDB88A}" dt="2025-09-24T02:22:05.319" v="8" actId="47"/>
-        <pc:sldMkLst>
-          <pc:docMk/>
-          <pc:sldMk cId="2350803268" sldId="259"/>
-        </pc:sldMkLst>
-      </pc:sldChg>
-      <pc:sldChg chg="del">
-        <pc:chgData name="Zonghua Gu" userId="9a7e1853e1951ef5" providerId="LiveId" clId="{CF1FAA12-072C-4ED5-BA76-0FFFAEFDB88A}" dt="2025-09-24T02:22:08.382" v="9" actId="47"/>
-        <pc:sldMkLst>
-          <pc:docMk/>
-          <pc:sldMk cId="3642733396" sldId="260"/>
-        </pc:sldMkLst>
-      </pc:sldChg>
-      <pc:sldChg chg="del">
-        <pc:chgData name="Zonghua Gu" userId="9a7e1853e1951ef5" providerId="LiveId" clId="{CF1FAA12-072C-4ED5-BA76-0FFFAEFDB88A}" dt="2025-09-24T02:22:08.382" v="9" actId="47"/>
-        <pc:sldMkLst>
-          <pc:docMk/>
-          <pc:sldMk cId="3881216825" sldId="261"/>
-        </pc:sldMkLst>
-      </pc:sldChg>
-      <pc:sldChg chg="del">
-        <pc:chgData name="Zonghua Gu" userId="9a7e1853e1951ef5" providerId="LiveId" clId="{CF1FAA12-072C-4ED5-BA76-0FFFAEFDB88A}" dt="2025-09-25T15:39:53.846" v="24" actId="47"/>
-        <pc:sldMkLst>
-          <pc:docMk/>
-          <pc:sldMk cId="2531244333" sldId="262"/>
-        </pc:sldMkLst>
-      </pc:sldChg>
-      <pc:sldChg chg="del">
-        <pc:chgData name="Zonghua Gu" userId="9a7e1853e1951ef5" providerId="LiveId" clId="{CF1FAA12-072C-4ED5-BA76-0FFFAEFDB88A}" dt="2025-10-09T21:57:50.746" v="32" actId="47"/>
-        <pc:sldMkLst>
-          <pc:docMk/>
-          <pc:sldMk cId="2716811776" sldId="351"/>
-        </pc:sldMkLst>
-      </pc:sldChg>
-      <pc:sldChg chg="del">
-        <pc:chgData name="Zonghua Gu" userId="9a7e1853e1951ef5" providerId="LiveId" clId="{CF1FAA12-072C-4ED5-BA76-0FFFAEFDB88A}" dt="2025-09-24T02:22:09.684" v="10" actId="47"/>
-        <pc:sldMkLst>
-          <pc:docMk/>
-          <pc:sldMk cId="3254334378" sldId="353"/>
-        </pc:sldMkLst>
-      </pc:sldChg>
-      <pc:sldChg chg="del">
-        <pc:chgData name="Zonghua Gu" userId="9a7e1853e1951ef5" providerId="LiveId" clId="{CF1FAA12-072C-4ED5-BA76-0FFFAEFDB88A}" dt="2025-09-24T02:22:24.782" v="18" actId="47"/>
-        <pc:sldMkLst>
-          <pc:docMk/>
-          <pc:sldMk cId="3592227053" sldId="356"/>
-        </pc:sldMkLst>
-      </pc:sldChg>
-      <pc:sldChg chg="del">
-        <pc:chgData name="Zonghua Gu" userId="9a7e1853e1951ef5" providerId="LiveId" clId="{CF1FAA12-072C-4ED5-BA76-0FFFAEFDB88A}" dt="2025-09-24T02:22:26.628" v="19" actId="47"/>
-        <pc:sldMkLst>
-          <pc:docMk/>
-          <pc:sldMk cId="1087692432" sldId="358"/>
-        </pc:sldMkLst>
-      </pc:sldChg>
-      <pc:sldChg chg="del">
-        <pc:chgData name="Zonghua Gu" userId="9a7e1853e1951ef5" providerId="LiveId" clId="{CF1FAA12-072C-4ED5-BA76-0FFFAEFDB88A}" dt="2025-10-07T21:16:17.881" v="28" actId="47"/>
-        <pc:sldMkLst>
-          <pc:docMk/>
-          <pc:sldMk cId="2623990252" sldId="383"/>
-        </pc:sldMkLst>
-      </pc:sldChg>
-      <pc:sldChg chg="modSp mod">
-        <pc:chgData name="Zonghua Gu" userId="9a7e1853e1951ef5" providerId="LiveId" clId="{CF1FAA12-072C-4ED5-BA76-0FFFAEFDB88A}" dt="2025-10-08T01:22:41.958" v="30" actId="15"/>
-        <pc:sldMkLst>
-          <pc:docMk/>
-          <pc:sldMk cId="1456166100" sldId="384"/>
-        </pc:sldMkLst>
-        <pc:spChg chg="mod">
-          <ac:chgData name="Zonghua Gu" userId="9a7e1853e1951ef5" providerId="LiveId" clId="{CF1FAA12-072C-4ED5-BA76-0FFFAEFDB88A}" dt="2025-10-08T01:22:41.958" v="30" actId="15"/>
-          <ac:spMkLst>
-            <pc:docMk/>
-            <pc:sldMk cId="1456166100" sldId="384"/>
-            <ac:spMk id="4" creationId="{FD21DA5F-0B0C-5E4B-FFBA-4A8692F7A975}"/>
-          </ac:spMkLst>
-        </pc:spChg>
-      </pc:sldChg>
-      <pc:sldChg chg="del">
-        <pc:chgData name="Zonghua Gu" userId="9a7e1853e1951ef5" providerId="LiveId" clId="{CF1FAA12-072C-4ED5-BA76-0FFFAEFDB88A}" dt="2025-09-24T02:22:27.907" v="20" actId="47"/>
-        <pc:sldMkLst>
-          <pc:docMk/>
-          <pc:sldMk cId="3808152940" sldId="385"/>
-        </pc:sldMkLst>
-      </pc:sldChg>
-      <pc:sldChg chg="del">
-        <pc:chgData name="Zonghua Gu" userId="9a7e1853e1951ef5" providerId="LiveId" clId="{CF1FAA12-072C-4ED5-BA76-0FFFAEFDB88A}" dt="2025-09-24T02:22:28.676" v="21" actId="47"/>
-        <pc:sldMkLst>
-          <pc:docMk/>
-          <pc:sldMk cId="1496054644" sldId="387"/>
-        </pc:sldMkLst>
-      </pc:sldChg>
-      <pc:sldChg chg="modSp add">
-        <pc:chgData name="Zonghua Gu" userId="9a7e1853e1951ef5" providerId="LiveId" clId="{CF1FAA12-072C-4ED5-BA76-0FFFAEFDB88A}" dt="2025-10-09T21:59:09.370" v="34" actId="1076"/>
-        <pc:sldMkLst>
-          <pc:docMk/>
-          <pc:sldMk cId="3531879706" sldId="553"/>
-        </pc:sldMkLst>
-        <pc:spChg chg="mod">
-          <ac:chgData name="Zonghua Gu" userId="9a7e1853e1951ef5" providerId="LiveId" clId="{CF1FAA12-072C-4ED5-BA76-0FFFAEFDB88A}" dt="2025-10-09T21:59:09.370" v="34" actId="1076"/>
-          <ac:spMkLst>
-            <pc:docMk/>
-            <pc:sldMk cId="3531879706" sldId="553"/>
-            <ac:spMk id="38917" creationId="{00000000-0000-0000-0000-000000000000}"/>
-          </ac:spMkLst>
-        </pc:spChg>
-      </pc:sldChg>
-      <pc:sldChg chg="del">
-        <pc:chgData name="Zonghua Gu" userId="9a7e1853e1951ef5" providerId="LiveId" clId="{CF1FAA12-072C-4ED5-BA76-0FFFAEFDB88A}" dt="2025-10-07T21:16:17.881" v="28" actId="47"/>
-        <pc:sldMkLst>
-          <pc:docMk/>
-          <pc:sldMk cId="4009754153" sldId="554"/>
-        </pc:sldMkLst>
-      </pc:sldChg>
-      <pc:sldChg chg="del">
-        <pc:chgData name="Zonghua Gu" userId="9a7e1853e1951ef5" providerId="LiveId" clId="{CF1FAA12-072C-4ED5-BA76-0FFFAEFDB88A}" dt="2025-09-24T02:21:55.533" v="1" actId="47"/>
-        <pc:sldMkLst>
-          <pc:docMk/>
-          <pc:sldMk cId="3198797166" sldId="556"/>
-        </pc:sldMkLst>
-      </pc:sldChg>
-      <pc:sldChg chg="del">
-        <pc:chgData name="Zonghua Gu" userId="9a7e1853e1951ef5" providerId="LiveId" clId="{CF1FAA12-072C-4ED5-BA76-0FFFAEFDB88A}" dt="2025-09-24T02:21:56.684" v="2" actId="47"/>
-        <pc:sldMkLst>
-          <pc:docMk/>
-          <pc:sldMk cId="3001218416" sldId="558"/>
-        </pc:sldMkLst>
-      </pc:sldChg>
-      <pc:sldChg chg="del">
-        <pc:chgData name="Zonghua Gu" userId="9a7e1853e1951ef5" providerId="LiveId" clId="{CF1FAA12-072C-4ED5-BA76-0FFFAEFDB88A}" dt="2025-09-24T02:22:10.688" v="11" actId="47"/>
-        <pc:sldMkLst>
-          <pc:docMk/>
-          <pc:sldMk cId="1329116476" sldId="560"/>
-        </pc:sldMkLst>
-      </pc:sldChg>
-      <pc:sldChg chg="modSp add del mod">
-        <pc:chgData name="Zonghua Gu" userId="9a7e1853e1951ef5" providerId="LiveId" clId="{CF1FAA12-072C-4ED5-BA76-0FFFAEFDB88A}" dt="2025-10-17T12:10:12.397" v="253" actId="20577"/>
-        <pc:sldMkLst>
-          <pc:docMk/>
-          <pc:sldMk cId="3280752258" sldId="561"/>
-        </pc:sldMkLst>
-        <pc:spChg chg="mod">
-          <ac:chgData name="Zonghua Gu" userId="9a7e1853e1951ef5" providerId="LiveId" clId="{CF1FAA12-072C-4ED5-BA76-0FFFAEFDB88A}" dt="2025-10-17T12:10:08.584" v="249" actId="20577"/>
-          <ac:spMkLst>
-            <pc:docMk/>
-            <pc:sldMk cId="3280752258" sldId="561"/>
-            <ac:spMk id="2" creationId="{3C452DBC-650F-2FD6-D799-9D9632A6EF51}"/>
-          </ac:spMkLst>
-        </pc:spChg>
-        <pc:spChg chg="mod">
-          <ac:chgData name="Zonghua Gu" userId="9a7e1853e1951ef5" providerId="LiveId" clId="{CF1FAA12-072C-4ED5-BA76-0FFFAEFDB88A}" dt="2025-10-17T12:10:12.397" v="253" actId="20577"/>
-          <ac:spMkLst>
-            <pc:docMk/>
-            <pc:sldMk cId="3280752258" sldId="561"/>
-            <ac:spMk id="4" creationId="{8B96A0C6-9296-BA88-C598-6B260416FC42}"/>
-          </ac:spMkLst>
-        </pc:spChg>
-      </pc:sldChg>
-      <pc:sldChg chg="del">
-        <pc:chgData name="Zonghua Gu" userId="9a7e1853e1951ef5" providerId="LiveId" clId="{CF1FAA12-072C-4ED5-BA76-0FFFAEFDB88A}" dt="2025-09-24T02:22:12.953" v="13" actId="47"/>
-        <pc:sldMkLst>
-          <pc:docMk/>
-          <pc:sldMk cId="2226504781" sldId="562"/>
-        </pc:sldMkLst>
-      </pc:sldChg>
-      <pc:sldChg chg="del">
-        <pc:chgData name="Zonghua Gu" userId="9a7e1853e1951ef5" providerId="LiveId" clId="{CF1FAA12-072C-4ED5-BA76-0FFFAEFDB88A}" dt="2025-09-24T02:21:57.566" v="3" actId="47"/>
-        <pc:sldMkLst>
-          <pc:docMk/>
-          <pc:sldMk cId="3678485956" sldId="565"/>
-        </pc:sldMkLst>
-      </pc:sldChg>
-      <pc:sldChg chg="del">
-        <pc:chgData name="Zonghua Gu" userId="9a7e1853e1951ef5" providerId="LiveId" clId="{CF1FAA12-072C-4ED5-BA76-0FFFAEFDB88A}" dt="2025-09-24T02:22:01.402" v="6" actId="47"/>
-        <pc:sldMkLst>
-          <pc:docMk/>
-          <pc:sldMk cId="4150398855" sldId="567"/>
-        </pc:sldMkLst>
-      </pc:sldChg>
-      <pc:sldChg chg="modSp mod">
-        <pc:chgData name="Zonghua Gu" userId="9a7e1853e1951ef5" providerId="LiveId" clId="{CF1FAA12-072C-4ED5-BA76-0FFFAEFDB88A}" dt="2025-09-24T02:24:36.422" v="23"/>
-        <pc:sldMkLst>
-          <pc:docMk/>
-          <pc:sldMk cId="570184693" sldId="568"/>
-        </pc:sldMkLst>
-        <pc:spChg chg="mod">
-          <ac:chgData name="Zonghua Gu" userId="9a7e1853e1951ef5" providerId="LiveId" clId="{CF1FAA12-072C-4ED5-BA76-0FFFAEFDB88A}" dt="2025-09-24T02:24:36.422" v="23"/>
-          <ac:spMkLst>
-            <pc:docMk/>
-            <pc:sldMk cId="570184693" sldId="568"/>
-            <ac:spMk id="4" creationId="{90B6A678-F78A-5E7F-A0E9-3A3B773CE733}"/>
-          </ac:spMkLst>
-        </pc:spChg>
-      </pc:sldChg>
-      <pc:sldChg chg="del">
-        <pc:chgData name="Zonghua Gu" userId="9a7e1853e1951ef5" providerId="LiveId" clId="{CF1FAA12-072C-4ED5-BA76-0FFFAEFDB88A}" dt="2025-09-24T02:22:17.008" v="14" actId="47"/>
-        <pc:sldMkLst>
-          <pc:docMk/>
-          <pc:sldMk cId="979784967" sldId="569"/>
-        </pc:sldMkLst>
-      </pc:sldChg>
-      <pc:sldChg chg="del">
-        <pc:chgData name="Zonghua Gu" userId="9a7e1853e1951ef5" providerId="LiveId" clId="{CF1FAA12-072C-4ED5-BA76-0FFFAEFDB88A}" dt="2025-09-24T02:22:18.506" v="15" actId="47"/>
-        <pc:sldMkLst>
-          <pc:docMk/>
-          <pc:sldMk cId="210341446" sldId="570"/>
-        </pc:sldMkLst>
-      </pc:sldChg>
-      <pc:sldChg chg="del">
-        <pc:chgData name="Zonghua Gu" userId="9a7e1853e1951ef5" providerId="LiveId" clId="{CF1FAA12-072C-4ED5-BA76-0FFFAEFDB88A}" dt="2025-09-24T02:22:20.409" v="16" actId="47"/>
-        <pc:sldMkLst>
-          <pc:docMk/>
-          <pc:sldMk cId="1649707196" sldId="572"/>
-        </pc:sldMkLst>
-      </pc:sldChg>
-      <pc:sldChg chg="del">
-        <pc:chgData name="Zonghua Gu" userId="9a7e1853e1951ef5" providerId="LiveId" clId="{CF1FAA12-072C-4ED5-BA76-0FFFAEFDB88A}" dt="2025-09-24T02:22:21.595" v="17" actId="47"/>
-        <pc:sldMkLst>
-          <pc:docMk/>
-          <pc:sldMk cId="4233569648" sldId="573"/>
-        </pc:sldMkLst>
-      </pc:sldChg>
-      <pc:sldChg chg="del">
-        <pc:chgData name="Zonghua Gu" userId="9a7e1853e1951ef5" providerId="LiveId" clId="{CF1FAA12-072C-4ED5-BA76-0FFFAEFDB88A}" dt="2025-09-24T02:21:59.311" v="4" actId="47"/>
-        <pc:sldMkLst>
-          <pc:docMk/>
-          <pc:sldMk cId="736856981" sldId="575"/>
-        </pc:sldMkLst>
-      </pc:sldChg>
-      <pc:sldChg chg="del">
-        <pc:chgData name="Zonghua Gu" userId="9a7e1853e1951ef5" providerId="LiveId" clId="{CF1FAA12-072C-4ED5-BA76-0FFFAEFDB88A}" dt="2025-09-24T02:22:00.289" v="5" actId="47"/>
-        <pc:sldMkLst>
-          <pc:docMk/>
-          <pc:sldMk cId="183442351" sldId="577"/>
-        </pc:sldMkLst>
-      </pc:sldChg>
-      <pc:sldChg chg="new del">
-        <pc:chgData name="Zonghua Gu" userId="9a7e1853e1951ef5" providerId="LiveId" clId="{CF1FAA12-072C-4ED5-BA76-0FFFAEFDB88A}" dt="2025-10-07T21:13:03.805" v="27" actId="47"/>
-        <pc:sldMkLst>
-          <pc:docMk/>
-          <pc:sldMk cId="3345466133" sldId="579"/>
-        </pc:sldMkLst>
-      </pc:sldChg>
-      <pc:sldChg chg="modSp add del mod">
-        <pc:chgData name="Zonghua Gu" userId="9a7e1853e1951ef5" providerId="LiveId" clId="{CF1FAA12-072C-4ED5-BA76-0FFFAEFDB88A}" dt="2025-10-16T23:18:31.366" v="228" actId="47"/>
-        <pc:sldMkLst>
-          <pc:docMk/>
-          <pc:sldMk cId="3350438353" sldId="587"/>
-        </pc:sldMkLst>
-      </pc:sldChg>
-      <pc:sldChg chg="add">
-        <pc:chgData name="Zonghua Gu" userId="9a7e1853e1951ef5" providerId="LiveId" clId="{CF1FAA12-072C-4ED5-BA76-0FFFAEFDB88A}" dt="2025-10-08T01:22:31.330" v="29"/>
-        <pc:sldMkLst>
-          <pc:docMk/>
-          <pc:sldMk cId="3677126747" sldId="589"/>
-        </pc:sldMkLst>
-      </pc:sldChg>
-      <pc:sldChg chg="add">
-        <pc:chgData name="Zonghua Gu" userId="9a7e1853e1951ef5" providerId="LiveId" clId="{CF1FAA12-072C-4ED5-BA76-0FFFAEFDB88A}" dt="2025-10-09T21:57:48.940" v="31"/>
-        <pc:sldMkLst>
-          <pc:docMk/>
-          <pc:sldMk cId="3279631536" sldId="590"/>
-        </pc:sldMkLst>
-      </pc:sldChg>
-      <pc:sldChg chg="modSp add mod">
-        <pc:chgData name="Zonghua Gu" userId="9a7e1853e1951ef5" providerId="LiveId" clId="{CF1FAA12-072C-4ED5-BA76-0FFFAEFDB88A}" dt="2025-10-17T12:03:59.741" v="246" actId="20577"/>
-        <pc:sldMkLst>
-          <pc:docMk/>
-          <pc:sldMk cId="3403107874" sldId="592"/>
-        </pc:sldMkLst>
-        <pc:spChg chg="mod">
-          <ac:chgData name="Zonghua Gu" userId="9a7e1853e1951ef5" providerId="LiveId" clId="{CF1FAA12-072C-4ED5-BA76-0FFFAEFDB88A}" dt="2025-10-17T12:03:19.494" v="232" actId="20577"/>
-          <ac:spMkLst>
-            <pc:docMk/>
-            <pc:sldMk cId="3403107874" sldId="592"/>
-            <ac:spMk id="2" creationId="{3BF8795C-148F-094D-80F5-1264C3578EE6}"/>
-          </ac:spMkLst>
-        </pc:spChg>
-        <pc:spChg chg="mod">
-          <ac:chgData name="Zonghua Gu" userId="9a7e1853e1951ef5" providerId="LiveId" clId="{CF1FAA12-072C-4ED5-BA76-0FFFAEFDB88A}" dt="2025-10-17T12:03:59.741" v="246" actId="20577"/>
-          <ac:spMkLst>
-            <pc:docMk/>
-            <pc:sldMk cId="3403107874" sldId="592"/>
-            <ac:spMk id="4" creationId="{2C569AB0-22FC-BE38-C5AA-9F8E6ECA54DA}"/>
-          </ac:spMkLst>
-        </pc:spChg>
-      </pc:sldChg>
-      <pc:sldChg chg="modSp add mod ord">
-        <pc:chgData name="Zonghua Gu" userId="9a7e1853e1951ef5" providerId="LiveId" clId="{CF1FAA12-072C-4ED5-BA76-0FFFAEFDB88A}" dt="2025-10-17T12:03:56.480" v="244" actId="20577"/>
-        <pc:sldMkLst>
-          <pc:docMk/>
-          <pc:sldMk cId="3657267278" sldId="593"/>
-        </pc:sldMkLst>
-        <pc:spChg chg="mod">
-          <ac:chgData name="Zonghua Gu" userId="9a7e1853e1951ef5" providerId="LiveId" clId="{CF1FAA12-072C-4ED5-BA76-0FFFAEFDB88A}" dt="2025-10-17T12:03:36.301" v="237" actId="20577"/>
-          <ac:spMkLst>
-            <pc:docMk/>
-            <pc:sldMk cId="3657267278" sldId="593"/>
-            <ac:spMk id="2" creationId="{9AB860C7-6D32-CED6-8DDA-C2F9D8462339}"/>
-          </ac:spMkLst>
-        </pc:spChg>
-        <pc:spChg chg="mod">
-          <ac:chgData name="Zonghua Gu" userId="9a7e1853e1951ef5" providerId="LiveId" clId="{CF1FAA12-072C-4ED5-BA76-0FFFAEFDB88A}" dt="2025-10-17T12:03:56.480" v="244" actId="20577"/>
-          <ac:spMkLst>
-            <pc:docMk/>
-            <pc:sldMk cId="3657267278" sldId="593"/>
-            <ac:spMk id="4" creationId="{B0AEBDB8-79A1-498D-B9D2-DDE87FE9C064}"/>
-          </ac:spMkLst>
-        </pc:spChg>
-      </pc:sldChg>
-      <pc:sldChg chg="add del">
-        <pc:chgData name="Zonghua Gu" userId="9a7e1853e1951ef5" providerId="LiveId" clId="{CF1FAA12-072C-4ED5-BA76-0FFFAEFDB88A}" dt="2025-10-17T12:10:24.526" v="254" actId="47"/>
-        <pc:sldMkLst>
-          <pc:docMk/>
-          <pc:sldMk cId="1161203829" sldId="594"/>
-        </pc:sldMkLst>
       </pc:sldChg>
     </pc:docChg>
   </pc:docChgLst>
@@ -644,7 +320,7 @@
             <a:fld id="{3AC3A17A-95E8-4381-B66B-5D6DE2B3048A}" type="datetimeFigureOut">
               <a:rPr lang="en-US" smtClean="0"/>
               <a:pPr/>
-              <a:t>10/17/2025</a:t>
+              <a:t>2/26/2026</a:t>
             </a:fld>
             <a:endParaRPr lang="en-US"/>
           </a:p>
@@ -1412,7 +1088,16 @@
                             </a:solidFill>
                             <a:latin typeface="Cambria Math" panose="02040503050406030204" pitchFamily="18" charset="0"/>
                           </a:rPr>
-                          <m:t>−1</m:t>
+                          <m:t>−</m:t>
+                        </m:r>
+                        <m:r>
+                          <a:rPr lang="en-US" sz="2800" b="0" i="1" smtClean="0">
+                            <a:solidFill>
+                              <a:prstClr val="black"/>
+                            </a:solidFill>
+                            <a:latin typeface="Cambria Math" panose="02040503050406030204" pitchFamily="18" charset="0"/>
+                          </a:rPr>
+                          <m:t>1</m:t>
                         </m:r>
                       </m:sup>
                     </m:sSup>
@@ -1423,7 +1108,16 @@
                         </a:solidFill>
                         <a:latin typeface="Cambria Math"/>
                       </a:rPr>
-                      <m:t>−1</m:t>
+                      <m:t>−</m:t>
+                    </m:r>
+                    <m:r>
+                      <a:rPr lang="en-US" sz="2800" i="1">
+                        <a:solidFill>
+                          <a:prstClr val="black"/>
+                        </a:solidFill>
+                        <a:latin typeface="Cambria Math"/>
+                      </a:rPr>
+                      <m:t>1</m:t>
                     </m:r>
                   </m:oMath>
                 </a14:m>
@@ -1517,7 +1211,16 @@
                             </a:solidFill>
                             <a:latin typeface="Cambria Math" panose="02040503050406030204" pitchFamily="18" charset="0"/>
                           </a:rPr>
-                          <m:t>−1</m:t>
+                          <m:t>−</m:t>
+                        </m:r>
+                        <m:r>
+                          <a:rPr lang="en-US" sz="2800" b="0" i="1" smtClean="0">
+                            <a:solidFill>
+                              <a:prstClr val="black"/>
+                            </a:solidFill>
+                            <a:latin typeface="Cambria Math" panose="02040503050406030204" pitchFamily="18" charset="0"/>
+                          </a:rPr>
+                          <m:t>1</m:t>
                         </m:r>
                       </m:sup>
                     </m:sSup>
@@ -3565,7 +3268,7 @@
             <a:fld id="{966FEA0E-C2DF-4252-97AD-54F2B7E07EAC}" type="datetime1">
               <a:rPr lang="en-US" smtClean="0"/>
               <a:pPr eaLnBrk="1" latinLnBrk="0" hangingPunct="1"/>
-              <a:t>10/17/2025</a:t>
+              <a:t>2/26/2026</a:t>
             </a:fld>
             <a:endParaRPr lang="en-US" sz="1600" dirty="0"/>
           </a:p>
@@ -3926,7 +3629,7 @@
             <a:fld id="{69EF9524-0CAA-4F98-BAC2-CE6B712F5E94}" type="datetime1">
               <a:rPr lang="en-US" smtClean="0"/>
               <a:pPr eaLnBrk="1" latinLnBrk="0" hangingPunct="1"/>
-              <a:t>10/17/2025</a:t>
+              <a:t>2/26/2026</a:t>
             </a:fld>
             <a:endParaRPr lang="en-US"/>
           </a:p>
@@ -4103,7 +3806,7 @@
             <a:fld id="{CB20516D-6F89-4C89-8307-32A716E22875}" type="datetime1">
               <a:rPr lang="en-US" smtClean="0"/>
               <a:pPr eaLnBrk="1" latinLnBrk="0" hangingPunct="1"/>
-              <a:t>10/17/2025</a:t>
+              <a:t>2/26/2026</a:t>
             </a:fld>
             <a:endParaRPr lang="en-US"/>
           </a:p>
@@ -4340,7 +4043,7 @@
             <a:fld id="{0CD88620-7329-4FC3-B65D-4EA691138F1B}" type="datetime1">
               <a:rPr lang="en-US" smtClean="0"/>
               <a:pPr eaLnBrk="1" latinLnBrk="0" hangingPunct="1"/>
-              <a:t>10/17/2025</a:t>
+              <a:t>2/26/2026</a:t>
             </a:fld>
             <a:endParaRPr lang="en-US" dirty="0"/>
           </a:p>
@@ -4611,7 +4314,7 @@
             <a:fld id="{0E46F3A1-5653-427D-9F78-56077401431A}" type="datetime1">
               <a:rPr lang="en-US" smtClean="0"/>
               <a:pPr eaLnBrk="1" latinLnBrk="0" hangingPunct="1"/>
-              <a:t>10/17/2025</a:t>
+              <a:t>2/26/2026</a:t>
             </a:fld>
             <a:endParaRPr lang="en-US" dirty="0"/>
           </a:p>
@@ -4833,7 +4536,7 @@
             <a:fld id="{CB67FC03-415A-45F0-B002-DF181377F7DC}" type="datetime1">
               <a:rPr lang="en-US" smtClean="0"/>
               <a:pPr eaLnBrk="1" latinLnBrk="0" hangingPunct="1"/>
-              <a:t>10/17/2025</a:t>
+              <a:t>2/26/2026</a:t>
             </a:fld>
             <a:endParaRPr lang="en-US"/>
           </a:p>
@@ -5187,7 +4890,7 @@
             <a:fld id="{1B6FC726-A0B4-4FC7-90F5-F17415A5C1A3}" type="datetime1">
               <a:rPr lang="en-US" smtClean="0"/>
               <a:pPr eaLnBrk="1" latinLnBrk="0" hangingPunct="1"/>
-              <a:t>10/17/2025</a:t>
+              <a:t>2/26/2026</a:t>
             </a:fld>
             <a:endParaRPr lang="en-US"/>
           </a:p>
@@ -5421,7 +5124,7 @@
             <a:fld id="{BE217211-C3F9-4892-9CC3-C7105638567D}" type="datetime1">
               <a:rPr lang="en-US" smtClean="0"/>
               <a:pPr eaLnBrk="1" latinLnBrk="0" hangingPunct="1"/>
-              <a:t>10/17/2025</a:t>
+              <a:t>2/26/2026</a:t>
             </a:fld>
             <a:endParaRPr lang="en-US"/>
           </a:p>
@@ -5564,7 +5267,7 @@
             <a:fld id="{BA713E6A-6B26-4373-A75B-EF395DC64F9E}" type="datetime1">
               <a:rPr lang="en-US" smtClean="0"/>
               <a:pPr eaLnBrk="1" latinLnBrk="0" hangingPunct="1"/>
-              <a:t>10/17/2025</a:t>
+              <a:t>2/26/2026</a:t>
             </a:fld>
             <a:endParaRPr lang="en-US"/>
           </a:p>
@@ -5843,7 +5546,7 @@
             <a:fld id="{57EB41EF-4260-415A-8DD6-FEDCC46E7EFC}" type="datetime1">
               <a:rPr lang="en-US" smtClean="0"/>
               <a:pPr eaLnBrk="1" latinLnBrk="0" hangingPunct="1"/>
-              <a:t>10/17/2025</a:t>
+              <a:t>2/26/2026</a:t>
             </a:fld>
             <a:endParaRPr lang="en-US"/>
           </a:p>
@@ -6252,7 +5955,7 @@
             <a:fld id="{6BDA80A0-06CC-4492-94A0-E8516751045E}" type="datetime1">
               <a:rPr lang="en-US" smtClean="0"/>
               <a:pPr eaLnBrk="1" latinLnBrk="0" hangingPunct="1"/>
-              <a:t>10/17/2025</a:t>
+              <a:t>2/26/2026</a:t>
             </a:fld>
             <a:endParaRPr lang="en-US"/>
           </a:p>
@@ -6591,7 +6294,7 @@
             <a:fld id="{A25B5B4B-57EE-495D-8E74-A657CFD8BB6C}" type="datetime1">
               <a:rPr lang="en-US" smtClean="0"/>
               <a:pPr eaLnBrk="1" latinLnBrk="0" hangingPunct="1"/>
-              <a:t>10/17/2025</a:t>
+              <a:t>2/26/2026</a:t>
             </a:fld>
             <a:endParaRPr lang="en-US" sz="1400" dirty="0">
               <a:solidFill>
@@ -7482,7 +7185,7 @@
         <p:spPr/>
         <p:txBody>
           <a:bodyPr>
-            <a:normAutofit fontScale="77500" lnSpcReduction="20000"/>
+            <a:normAutofit fontScale="85000" lnSpcReduction="20000"/>
           </a:bodyPr>
           <a:lstStyle/>
           <a:p>
@@ -7532,6 +7235,18 @@
             </a:r>
           </a:p>
           <a:p>
+            <a:pPr lvl="1"/>
+            <a:r>
+              <a:rPr lang="pt-BR" dirty="0"/>
+              <a:t>Or: MOV r0, r0</a:t>
+            </a:r>
+            <a:r>
+              <a:rPr lang="pt-BR"/>
+              <a:t>, ASR 2</a:t>
+            </a:r>
+            <a:endParaRPr lang="pt-BR" dirty="0"/>
+          </a:p>
+          <a:p>
             <a:r>
               <a:rPr lang="pt-BR" dirty="0"/>
               <a:t>Q3:</a:t>
@@ -7557,27 +7272,10 @@
             <a:endParaRPr lang="en-US" dirty="0"/>
           </a:p>
           <a:p>
+            <a:pPr lvl="1"/>
             <a:r>
               <a:rPr lang="pt-BR" dirty="0"/>
-              <a:t>Q4:</a:t>
-            </a:r>
-          </a:p>
-          <a:p>
-            <a:pPr lvl="1"/>
-            <a:r>
-              <a:rPr lang="pt-BR" dirty="0"/>
-              <a:t>LDR r0, =</a:t>
-            </a:r>
-            <a:r>
-              <a:rPr lang="en-US" dirty="0"/>
-              <a:t>0xFFFFC000</a:t>
-            </a:r>
-          </a:p>
-          <a:p>
-            <a:pPr lvl="1"/>
-            <a:r>
-              <a:rPr lang="pt-BR" dirty="0"/>
-              <a:t>MOV r0, r0, ASR 2</a:t>
+              <a:t>Or: MOV r0, r0, ASR 2</a:t>
             </a:r>
           </a:p>
           <a:p>
